--- a/neerlandais1/powerpoints/Module_15_Het_perfectum.pptx
+++ b/neerlandais1/powerpoints/Module_15_Het_perfectum.pptx
@@ -135,18 +135,18 @@
   <p:extLst>
     <p:ext uri="{521415D9-36F7-43E2-AB2F-B90AF26B5E84}">
       <p14:sectionLst xmlns:p14="http://schemas.microsoft.com/office/powerpoint/2010/main">
-        <p14:section name="Ouverture" id="{19aed987-0e70-f053-b183-b7e06d9ca313}">
+        <p14:section name="Ouverture" id="{c32a10fe-2f9e-5017-af1f-0e3c161afd06}">
           <p14:sldIdLst>
             <p14:sldId id="256"/>
           </p14:sldIdLst>
         </p14:section>
-        <p14:section name="Découvrir" id="{042295ac-18d8-c6d9-95da-f7693d21249a}">
+        <p14:section name="Découvrir" id="{74181ca2-22ae-f9b6-2821-062588ca36c5}">
           <p14:sldIdLst>
             <p14:sldId id="257"/>
             <p14:sldId id="258"/>
           </p14:sldIdLst>
         </p14:section>
-        <p14:section name="Comprendre" id="{692d7225-dd3b-ac9f-2490-2e63adcddb3d}">
+        <p14:section name="Comprendre" id="{be7530e8-c143-690c-9e9c-8868a5b423ff}">
           <p14:sldIdLst>
             <p14:sldId id="259"/>
             <p14:sldId id="260"/>
@@ -162,7 +162,7 @@
             <p14:sldId id="270"/>
           </p14:sldIdLst>
         </p14:section>
-        <p14:section name="JIJ NU ! — Oefeningen" id="{9b3508b1-1a5a-0b30-dd00-5e8e9fe23c2a}">
+        <p14:section name="JIJ NU ! — Oefeningen" id="{00255282-f155-9eda-ce07-b12cf0488e59}">
           <p14:sldIdLst>
             <p14:sldId id="271"/>
             <p14:sldId id="272"/>
@@ -179,7 +179,7 @@
             <p14:sldId id="283"/>
           </p14:sldIdLst>
         </p14:section>
-        <p14:section name="Clôture" id="{9f39f00f-3567-d887-0191-f428468d805a}">
+        <p14:section name="Clôture" id="{0445fbf4-0eef-deab-482c-911cd84e1080}">
           <p14:sldIdLst>
             <p14:sldId id="284"/>
           </p14:sldIdLst>
@@ -2462,12 +2462,12 @@
           <a:p>
             <a:r>
               <a:rPr lang="en-US" dirty="0"/>
-              <a:t>Objectif : Vérifier les 3 objectifs et clore le parcours Néerlandais 1.
+              <a:t>Objectif : Vérifier les 3 objectifs et clore les blocs 1 à 3.
 Réponses :
 1. opgebeld · verteld.
 2. ben.
 3. Ik heb niet gewerkt.
-Bilan : faites relire la frise des 15 modules et choisir un module à retravailler. En Néerlandais 2 : l'imparfait, les relatives, om … te, l'adjectif, les autres conjonctions, hoeven te.</a:t>
+Bilan : faites relire la frise des 15 modules et choisir un module à retravailler. Bloc 4 : l'impératif (M16), les verbes de position (M17), le futur (M18) et l'imparfait (M19, bilan final du parcours).</a:t>
             </a:r>
             <a:endParaRPr lang="en-US" dirty="0"/>
           </a:p>
@@ -3988,7 +3988,7 @@
                   <a:srgbClr val="FFFFFF"/>
                 </a:solidFill>
               </a:rPr>
-              <a:t>MODULE 15 / 15</a:t>
+              <a:t>MODULE 15 / 19</a:t>
             </a:r>
             <a:endParaRPr lang="en-US" sz="1400" dirty="0"/>
           </a:p>
@@ -32332,7 +32332,7 @@
                   <a:schemeClr val="tx2"/>
                 </a:solidFill>
               </a:rPr>
-              <a:t>Ticket de sortie et bilan du parcours</a:t>
+              <a:t>Ticket de sortie et bilan du bloc 3</a:t>
             </a:r>
             <a:endParaRPr lang="en-US" sz="3000" dirty="0"/>
           </a:p>
@@ -33352,7 +33352,7 @@
                   <a:schemeClr val="bg1"/>
                 </a:solidFill>
               </a:rPr>
-              <a:t>Proficiat! Néerlandais 1 is klaar.</a:t>
+              <a:t>Proficiat! Bloc 3 is klaar.</a:t>
             </a:r>
             <a:r>
               <a:rPr lang="en-US" sz="1800" dirty="0">
@@ -33360,7 +33360,7 @@
                   <a:schemeClr val="bg1"/>
                 </a:solidFill>
               </a:rPr>
-              <a:t> — Volgende stap : Néerlandais 2</a:t>
+              <a:t> — Volgende stap : bloc 4, M16 De gebiedende wijs</a:t>
             </a:r>
             <a:endParaRPr lang="en-US" sz="1800" dirty="0"/>
           </a:p>
@@ -33396,7 +33396,7 @@
                   <a:schemeClr val="accent5"/>
                 </a:solidFill>
               </a:rPr>
-              <a:t>NÉERLANDAIS 1 · 15 MODULES</a:t>
+              <a:t>BLOCS 1 À 3 · 15 MODULES</a:t>
             </a:r>
             <a:endParaRPr lang="en-US" sz="1200" dirty="0"/>
           </a:p>

--- a/neerlandais1/powerpoints/Module_15_Het_perfectum.pptx
+++ b/neerlandais1/powerpoints/Module_15_Het_perfectum.pptx
@@ -135,18 +135,18 @@
   <p:extLst>
     <p:ext uri="{521415D9-36F7-43E2-AB2F-B90AF26B5E84}">
       <p14:sectionLst xmlns:p14="http://schemas.microsoft.com/office/powerpoint/2010/main">
-        <p14:section name="Ouverture" id="{c32a10fe-2f9e-5017-af1f-0e3c161afd06}">
+        <p14:section name="Ouverture" id="{4d07df82-2c40-a843-de57-0b71e1f3961d}">
           <p14:sldIdLst>
             <p14:sldId id="256"/>
           </p14:sldIdLst>
         </p14:section>
-        <p14:section name="Découvrir" id="{74181ca2-22ae-f9b6-2821-062588ca36c5}">
+        <p14:section name="Découvrir" id="{44419238-e426-5649-da0b-c2cfa13d97cf}">
           <p14:sldIdLst>
             <p14:sldId id="257"/>
             <p14:sldId id="258"/>
           </p14:sldIdLst>
         </p14:section>
-        <p14:section name="Comprendre" id="{be7530e8-c143-690c-9e9c-8868a5b423ff}">
+        <p14:section name="Comprendre" id="{9d42ad49-1c6a-48c5-1199-3fb9e966cfc9}">
           <p14:sldIdLst>
             <p14:sldId id="259"/>
             <p14:sldId id="260"/>
@@ -162,7 +162,7 @@
             <p14:sldId id="270"/>
           </p14:sldIdLst>
         </p14:section>
-        <p14:section name="JIJ NU ! — Oefeningen" id="{00255282-f155-9eda-ce07-b12cf0488e59}">
+        <p14:section name="JIJ NU ! — Oefeningen" id="{72fb367c-0942-f67b-d9e3-5d08478f3ee5}">
           <p14:sldIdLst>
             <p14:sldId id="271"/>
             <p14:sldId id="272"/>
@@ -179,7 +179,7 @@
             <p14:sldId id="283"/>
           </p14:sldIdLst>
         </p14:section>
-        <p14:section name="Clôture" id="{0445fbf4-0eef-deab-482c-911cd84e1080}">
+        <p14:section name="Clôture" id="{b7debf12-4c9c-0043-e2b3-8d1617111e48}">
           <p14:sldIdLst>
             <p14:sldId id="284"/>
           </p14:sldIdLst>
@@ -2374,7 +2374,7 @@
             <a:r>
               <a:rPr lang="en-US" dirty="0"/>
               <a:t>Objectif : Mise en situation professionnelle : rendre compte de sa semaine.
-gelukt = réussi (lukken, M8 : Lukt dat?). Chacun parle une minute, puis l'équipe pose une question (Heb je ook…?). C'est la tâche finale orale du parcours.</a:t>
+gelukt = réussi (lukken, M8 : Lukt dat?). Chacun parle une minute, puis l'équipe pose une question (Heb je ook…?). C'est la tâche finale orale du bloc 3.</a:t>
             </a:r>
             <a:endParaRPr lang="en-US" dirty="0"/>
           </a:p>
@@ -2467,7 +2467,7 @@
 1. opgebeld · verteld.
 2. ben.
 3. Ik heb niet gewerkt.
-Bilan : faites relire la frise des 15 modules et choisir un module à retravailler. Bloc 4 : l'impératif (M16), les verbes de position (M17), le futur (M18) et l'imparfait (M19, bilan final du parcours).</a:t>
+Bilan : faites relire la frise des 15 modules et choisir un module à retravailler. Bloc 4 : l'impératif (M16), les verbes de position (M17), le futur (M18) et l'imparfait (M19, bilan du bloc 4).</a:t>
             </a:r>
             <a:endParaRPr lang="en-US" dirty="0"/>
           </a:p>
@@ -3988,7 +3988,7 @@
                   <a:srgbClr val="FFFFFF"/>
                 </a:solidFill>
               </a:rPr>
-              <a:t>MODULE 15 / 19</a:t>
+              <a:t>MODULE 15 / 24</a:t>
             </a:r>
             <a:endParaRPr lang="en-US" sz="1400" dirty="0"/>
           </a:p>

--- a/neerlandais1/powerpoints/Module_15_Het_perfectum.pptx
+++ b/neerlandais1/powerpoints/Module_15_Het_perfectum.pptx
@@ -135,18 +135,18 @@
   <p:extLst>
     <p:ext uri="{521415D9-36F7-43E2-AB2F-B90AF26B5E84}">
       <p14:sectionLst xmlns:p14="http://schemas.microsoft.com/office/powerpoint/2010/main">
-        <p14:section name="Ouverture" id="{4d07df82-2c40-a843-de57-0b71e1f3961d}">
+        <p14:section name="Ouverture" id="{f4aa054a-a266-c949-899b-4799a033fe7b}">
           <p14:sldIdLst>
             <p14:sldId id="256"/>
           </p14:sldIdLst>
         </p14:section>
-        <p14:section name="Découvrir" id="{44419238-e426-5649-da0b-c2cfa13d97cf}">
+        <p14:section name="Découvrir" id="{c4825ca7-35fe-fb73-968c-27aff71cb302}">
           <p14:sldIdLst>
             <p14:sldId id="257"/>
             <p14:sldId id="258"/>
           </p14:sldIdLst>
         </p14:section>
-        <p14:section name="Comprendre" id="{9d42ad49-1c6a-48c5-1199-3fb9e966cfc9}">
+        <p14:section name="Comprendre" id="{34149f4e-0ffa-4baf-7c6b-f4a54953d465}">
           <p14:sldIdLst>
             <p14:sldId id="259"/>
             <p14:sldId id="260"/>
@@ -162,7 +162,7 @@
             <p14:sldId id="270"/>
           </p14:sldIdLst>
         </p14:section>
-        <p14:section name="JIJ NU ! — Oefeningen" id="{72fb367c-0942-f67b-d9e3-5d08478f3ee5}">
+        <p14:section name="JIJ NU ! — Oefeningen" id="{2bdc8999-48c8-b62a-7f3b-0a9966b3c6d5}">
           <p14:sldIdLst>
             <p14:sldId id="271"/>
             <p14:sldId id="272"/>
@@ -179,7 +179,7 @@
             <p14:sldId id="283"/>
           </p14:sldIdLst>
         </p14:section>
-        <p14:section name="Clôture" id="{b7debf12-4c9c-0043-e2b3-8d1617111e48}">
+        <p14:section name="Clôture" id="{a3f02878-9be3-9ad2-f6d7-6f669a4bfb77}">
           <p14:sldIdLst>
             <p14:sldId id="284"/>
           </p14:sldIdLst>
@@ -3988,7 +3988,7 @@
                   <a:srgbClr val="FFFFFF"/>
                 </a:solidFill>
               </a:rPr>
-              <a:t>MODULE 15 / 24</a:t>
+              <a:t>MODULE 15 / 29</a:t>
             </a:r>
             <a:endParaRPr lang="en-US" sz="1400" dirty="0"/>
           </a:p>

--- a/neerlandais1/powerpoints/Module_15_Het_perfectum.pptx
+++ b/neerlandais1/powerpoints/Module_15_Het_perfectum.pptx
@@ -135,18 +135,18 @@
   <p:extLst>
     <p:ext uri="{521415D9-36F7-43E2-AB2F-B90AF26B5E84}">
       <p14:sectionLst xmlns:p14="http://schemas.microsoft.com/office/powerpoint/2010/main">
-        <p14:section name="Ouverture" id="{f4aa054a-a266-c949-899b-4799a033fe7b}">
+        <p14:section name="Ouverture" id="{9c797c84-f468-b17b-fd6d-cc3e08ccf12c}">
           <p14:sldIdLst>
             <p14:sldId id="256"/>
           </p14:sldIdLst>
         </p14:section>
-        <p14:section name="Découvrir" id="{c4825ca7-35fe-fb73-968c-27aff71cb302}">
+        <p14:section name="Découvrir" id="{3c1794d2-a5a6-fa11-fab8-3eedcb480006}">
           <p14:sldIdLst>
             <p14:sldId id="257"/>
             <p14:sldId id="258"/>
           </p14:sldIdLst>
         </p14:section>
-        <p14:section name="Comprendre" id="{34149f4e-0ffa-4baf-7c6b-f4a54953d465}">
+        <p14:section name="Comprendre" id="{ae58bae8-8af3-1c43-2ffa-f2fefc39aa6a}">
           <p14:sldIdLst>
             <p14:sldId id="259"/>
             <p14:sldId id="260"/>
@@ -162,7 +162,7 @@
             <p14:sldId id="270"/>
           </p14:sldIdLst>
         </p14:section>
-        <p14:section name="JIJ NU ! — Oefeningen" id="{2bdc8999-48c8-b62a-7f3b-0a9966b3c6d5}">
+        <p14:section name="JIJ NU ! — Oefeningen" id="{b046a030-6769-43b5-ac7a-43bb4dc6a41f}">
           <p14:sldIdLst>
             <p14:sldId id="271"/>
             <p14:sldId id="272"/>
@@ -179,7 +179,7 @@
             <p14:sldId id="283"/>
           </p14:sldIdLst>
         </p14:section>
-        <p14:section name="Clôture" id="{a3f02878-9be3-9ad2-f6d7-6f669a4bfb77}">
+        <p14:section name="Clôture" id="{e8858226-5ad9-56ec-7805-c011ae079178}">
           <p14:sldIdLst>
             <p14:sldId id="284"/>
           </p14:sldIdLst>
@@ -3988,7 +3988,7 @@
                   <a:srgbClr val="FFFFFF"/>
                 </a:solidFill>
               </a:rPr>
-              <a:t>MODULE 15 / 29</a:t>
+              <a:t>MODULE 15 / 32</a:t>
             </a:r>
             <a:endParaRPr lang="en-US" sz="1400" dirty="0"/>
           </a:p>

--- a/neerlandais1/powerpoints/Module_15_Het_perfectum.pptx
+++ b/neerlandais1/powerpoints/Module_15_Het_perfectum.pptx
@@ -135,18 +135,18 @@
   <p:extLst>
     <p:ext uri="{521415D9-36F7-43E2-AB2F-B90AF26B5E84}">
       <p14:sectionLst xmlns:p14="http://schemas.microsoft.com/office/powerpoint/2010/main">
-        <p14:section name="Ouverture" id="{9c797c84-f468-b17b-fd6d-cc3e08ccf12c}">
+        <p14:section name="Ouverture" id="{37b11fb3-5e67-963b-ecfd-7892f902c0ea}">
           <p14:sldIdLst>
             <p14:sldId id="256"/>
           </p14:sldIdLst>
         </p14:section>
-        <p14:section name="Découvrir" id="{3c1794d2-a5a6-fa11-fab8-3eedcb480006}">
+        <p14:section name="Découvrir" id="{2322e010-5570-e5d9-dc8e-318e43e53ebc}">
           <p14:sldIdLst>
             <p14:sldId id="257"/>
             <p14:sldId id="258"/>
           </p14:sldIdLst>
         </p14:section>
-        <p14:section name="Comprendre" id="{ae58bae8-8af3-1c43-2ffa-f2fefc39aa6a}">
+        <p14:section name="Comprendre" id="{ae555ed5-638f-2676-689b-04d34ab7e783}">
           <p14:sldIdLst>
             <p14:sldId id="259"/>
             <p14:sldId id="260"/>
@@ -162,7 +162,7 @@
             <p14:sldId id="270"/>
           </p14:sldIdLst>
         </p14:section>
-        <p14:section name="JIJ NU ! — Oefeningen" id="{b046a030-6769-43b5-ac7a-43bb4dc6a41f}">
+        <p14:section name="JIJ NU ! — Oefeningen" id="{cf546771-ea65-5612-2b24-26244d4f7025}">
           <p14:sldIdLst>
             <p14:sldId id="271"/>
             <p14:sldId id="272"/>
@@ -179,7 +179,7 @@
             <p14:sldId id="283"/>
           </p14:sldIdLst>
         </p14:section>
-        <p14:section name="Clôture" id="{e8858226-5ad9-56ec-7805-c011ae079178}">
+        <p14:section name="Clôture" id="{8bf24a9e-0c5b-00c2-edd2-1a6fc2faa281}">
           <p14:sldIdLst>
             <p14:sldId id="284"/>
           </p14:sldIdLst>

--- a/neerlandais1/powerpoints/Module_15_Het_perfectum.pptx
+++ b/neerlandais1/powerpoints/Module_15_Het_perfectum.pptx
@@ -135,18 +135,18 @@
   <p:extLst>
     <p:ext uri="{521415D9-36F7-43E2-AB2F-B90AF26B5E84}">
       <p14:sectionLst xmlns:p14="http://schemas.microsoft.com/office/powerpoint/2010/main">
-        <p14:section name="Ouverture" id="{37b11fb3-5e67-963b-ecfd-7892f902c0ea}">
+        <p14:section name="Ouverture" id="{466325f0-faa8-f293-5d94-97c33ea609fe}">
           <p14:sldIdLst>
             <p14:sldId id="256"/>
           </p14:sldIdLst>
         </p14:section>
-        <p14:section name="Découvrir" id="{2322e010-5570-e5d9-dc8e-318e43e53ebc}">
+        <p14:section name="Découvrir" id="{964aa472-4f82-635b-7247-17102b9899dd}">
           <p14:sldIdLst>
             <p14:sldId id="257"/>
             <p14:sldId id="258"/>
           </p14:sldIdLst>
         </p14:section>
-        <p14:section name="Comprendre" id="{ae555ed5-638f-2676-689b-04d34ab7e783}">
+        <p14:section name="Comprendre" id="{09aad5e0-376a-ded1-a1fe-b1293de1bdae}">
           <p14:sldIdLst>
             <p14:sldId id="259"/>
             <p14:sldId id="260"/>
@@ -162,7 +162,7 @@
             <p14:sldId id="270"/>
           </p14:sldIdLst>
         </p14:section>
-        <p14:section name="JIJ NU ! — Oefeningen" id="{cf546771-ea65-5612-2b24-26244d4f7025}">
+        <p14:section name="JIJ NU ! — Oefeningen" id="{28457c57-e360-b820-dba6-e9205c34f03a}">
           <p14:sldIdLst>
             <p14:sldId id="271"/>
             <p14:sldId id="272"/>
@@ -179,7 +179,7 @@
             <p14:sldId id="283"/>
           </p14:sldIdLst>
         </p14:section>
-        <p14:section name="Clôture" id="{8bf24a9e-0c5b-00c2-edd2-1a6fc2faa281}">
+        <p14:section name="Clôture" id="{5286eedb-1553-7c7f-efec-9a6e8941c247}">
           <p14:sldIdLst>
             <p14:sldId id="284"/>
           </p14:sldIdLst>

--- a/neerlandais1/powerpoints/Module_15_Het_perfectum.pptx
+++ b/neerlandais1/powerpoints/Module_15_Het_perfectum.pptx
@@ -135,18 +135,18 @@
   <p:extLst>
     <p:ext uri="{521415D9-36F7-43E2-AB2F-B90AF26B5E84}">
       <p14:sectionLst xmlns:p14="http://schemas.microsoft.com/office/powerpoint/2010/main">
-        <p14:section name="Ouverture" id="{466325f0-faa8-f293-5d94-97c33ea609fe}">
+        <p14:section name="Ouverture" id="{b3b59711-3bcc-b069-4d98-c2e8dcc2b5a6}">
           <p14:sldIdLst>
             <p14:sldId id="256"/>
           </p14:sldIdLst>
         </p14:section>
-        <p14:section name="Découvrir" id="{964aa472-4f82-635b-7247-17102b9899dd}">
+        <p14:section name="Découvrir" id="{977828ea-6fba-accb-5aba-f4aea508b41f}">
           <p14:sldIdLst>
             <p14:sldId id="257"/>
             <p14:sldId id="258"/>
           </p14:sldIdLst>
         </p14:section>
-        <p14:section name="Comprendre" id="{09aad5e0-376a-ded1-a1fe-b1293de1bdae}">
+        <p14:section name="Comprendre" id="{95c7e6d9-eda4-b567-ce02-523a13ec6d83}">
           <p14:sldIdLst>
             <p14:sldId id="259"/>
             <p14:sldId id="260"/>
@@ -162,7 +162,7 @@
             <p14:sldId id="270"/>
           </p14:sldIdLst>
         </p14:section>
-        <p14:section name="JIJ NU ! — Oefeningen" id="{28457c57-e360-b820-dba6-e9205c34f03a}">
+        <p14:section name="JIJ NU ! — Oefeningen" id="{eff72cdf-0559-b1d5-bb87-87f5d9cb3133}">
           <p14:sldIdLst>
             <p14:sldId id="271"/>
             <p14:sldId id="272"/>
@@ -179,7 +179,7 @@
             <p14:sldId id="283"/>
           </p14:sldIdLst>
         </p14:section>
-        <p14:section name="Clôture" id="{5286eedb-1553-7c7f-efec-9a6e8941c247}">
+        <p14:section name="Clôture" id="{9d368c06-57fc-c86f-78f4-bde2dfec56a8}">
           <p14:sldIdLst>
             <p14:sldId id="284"/>
           </p14:sldIdLst>

--- a/neerlandais1/powerpoints/Module_15_Het_perfectum.pptx
+++ b/neerlandais1/powerpoints/Module_15_Het_perfectum.pptx
@@ -135,18 +135,18 @@
   <p:extLst>
     <p:ext uri="{521415D9-36F7-43E2-AB2F-B90AF26B5E84}">
       <p14:sectionLst xmlns:p14="http://schemas.microsoft.com/office/powerpoint/2010/main">
-        <p14:section name="Ouverture" id="{b3b59711-3bcc-b069-4d98-c2e8dcc2b5a6}">
+        <p14:section name="Ouverture" id="{b3d57018-921a-5928-af5e-d1c47fc0161c}">
           <p14:sldIdLst>
             <p14:sldId id="256"/>
           </p14:sldIdLst>
         </p14:section>
-        <p14:section name="Découvrir" id="{977828ea-6fba-accb-5aba-f4aea508b41f}">
+        <p14:section name="Découvrir" id="{42c1ac75-b736-9090-e632-260496aebea3}">
           <p14:sldIdLst>
             <p14:sldId id="257"/>
             <p14:sldId id="258"/>
           </p14:sldIdLst>
         </p14:section>
-        <p14:section name="Comprendre" id="{95c7e6d9-eda4-b567-ce02-523a13ec6d83}">
+        <p14:section name="Comprendre" id="{6d08cda7-0220-3f61-545c-33ddf6a13adb}">
           <p14:sldIdLst>
             <p14:sldId id="259"/>
             <p14:sldId id="260"/>
@@ -162,7 +162,7 @@
             <p14:sldId id="270"/>
           </p14:sldIdLst>
         </p14:section>
-        <p14:section name="JIJ NU ! — Oefeningen" id="{eff72cdf-0559-b1d5-bb87-87f5d9cb3133}">
+        <p14:section name="JIJ NU ! — Oefeningen" id="{d25fa974-965c-0080-7363-6dc4847e2d6a}">
           <p14:sldIdLst>
             <p14:sldId id="271"/>
             <p14:sldId id="272"/>
@@ -179,7 +179,7 @@
             <p14:sldId id="283"/>
           </p14:sldIdLst>
         </p14:section>
-        <p14:section name="Clôture" id="{9d368c06-57fc-c86f-78f4-bde2dfec56a8}">
+        <p14:section name="Clôture" id="{bc9b7546-1911-ff0f-b052-56e6e887eaba}">
           <p14:sldIdLst>
             <p14:sldId id="284"/>
           </p14:sldIdLst>

--- a/neerlandais1/powerpoints/Module_15_Het_perfectum.pptx
+++ b/neerlandais1/powerpoints/Module_15_Het_perfectum.pptx
@@ -135,18 +135,18 @@
   <p:extLst>
     <p:ext uri="{521415D9-36F7-43E2-AB2F-B90AF26B5E84}">
       <p14:sectionLst xmlns:p14="http://schemas.microsoft.com/office/powerpoint/2010/main">
-        <p14:section name="Ouverture" id="{b3d57018-921a-5928-af5e-d1c47fc0161c}">
+        <p14:section name="Ouverture" id="{99efcff3-0e1f-579f-908e-5f81267754b2}">
           <p14:sldIdLst>
             <p14:sldId id="256"/>
           </p14:sldIdLst>
         </p14:section>
-        <p14:section name="Découvrir" id="{42c1ac75-b736-9090-e632-260496aebea3}">
+        <p14:section name="Découvrir" id="{b7853d45-8e81-64cc-8e86-c4cca5290163}">
           <p14:sldIdLst>
             <p14:sldId id="257"/>
             <p14:sldId id="258"/>
           </p14:sldIdLst>
         </p14:section>
-        <p14:section name="Comprendre" id="{6d08cda7-0220-3f61-545c-33ddf6a13adb}">
+        <p14:section name="Comprendre" id="{9396e327-bcd8-d567-752a-ebcbf5e2bd78}">
           <p14:sldIdLst>
             <p14:sldId id="259"/>
             <p14:sldId id="260"/>
@@ -162,7 +162,7 @@
             <p14:sldId id="270"/>
           </p14:sldIdLst>
         </p14:section>
-        <p14:section name="JIJ NU ! — Oefeningen" id="{d25fa974-965c-0080-7363-6dc4847e2d6a}">
+        <p14:section name="JIJ NU ! — Oefeningen" id="{fef3c72f-1fb5-d119-fb67-83c37c187978}">
           <p14:sldIdLst>
             <p14:sldId id="271"/>
             <p14:sldId id="272"/>
@@ -179,7 +179,7 @@
             <p14:sldId id="283"/>
           </p14:sldIdLst>
         </p14:section>
-        <p14:section name="Clôture" id="{bc9b7546-1911-ff0f-b052-56e6e887eaba}">
+        <p14:section name="Clôture" id="{61dbfc96-17a2-5deb-b638-9b43f86e23a2}">
           <p14:sldIdLst>
             <p14:sldId id="284"/>
           </p14:sldIdLst>

--- a/neerlandais1/powerpoints/Module_15_Het_perfectum.pptx
+++ b/neerlandais1/powerpoints/Module_15_Het_perfectum.pptx
@@ -135,18 +135,18 @@
   <p:extLst>
     <p:ext uri="{521415D9-36F7-43E2-AB2F-B90AF26B5E84}">
       <p14:sectionLst xmlns:p14="http://schemas.microsoft.com/office/powerpoint/2010/main">
-        <p14:section name="Ouverture" id="{99efcff3-0e1f-579f-908e-5f81267754b2}">
+        <p14:section name="Ouverture" id="{8ba56c3a-f6f3-226e-8700-2bbd603defe2}">
           <p14:sldIdLst>
             <p14:sldId id="256"/>
           </p14:sldIdLst>
         </p14:section>
-        <p14:section name="Découvrir" id="{b7853d45-8e81-64cc-8e86-c4cca5290163}">
+        <p14:section name="Découvrir" id="{09068495-d94e-cbce-e839-c454909c1896}">
           <p14:sldIdLst>
             <p14:sldId id="257"/>
             <p14:sldId id="258"/>
           </p14:sldIdLst>
         </p14:section>
-        <p14:section name="Comprendre" id="{9396e327-bcd8-d567-752a-ebcbf5e2bd78}">
+        <p14:section name="Comprendre" id="{01b977d7-4f5d-9671-5500-3a0b087712f6}">
           <p14:sldIdLst>
             <p14:sldId id="259"/>
             <p14:sldId id="260"/>
@@ -162,7 +162,7 @@
             <p14:sldId id="270"/>
           </p14:sldIdLst>
         </p14:section>
-        <p14:section name="JIJ NU ! — Oefeningen" id="{fef3c72f-1fb5-d119-fb67-83c37c187978}">
+        <p14:section name="JIJ NU ! — Oefeningen" id="{d11025f2-2f6a-da99-e4c1-8234af4d237b}">
           <p14:sldIdLst>
             <p14:sldId id="271"/>
             <p14:sldId id="272"/>
@@ -179,7 +179,7 @@
             <p14:sldId id="283"/>
           </p14:sldIdLst>
         </p14:section>
-        <p14:section name="Clôture" id="{61dbfc96-17a2-5deb-b638-9b43f86e23a2}">
+        <p14:section name="Clôture" id="{11b248de-4d9c-be01-9c96-3a73b6d4ad1d}">
           <p14:sldIdLst>
             <p14:sldId id="284"/>
           </p14:sldIdLst>

--- a/neerlandais1/powerpoints/Module_15_Het_perfectum.pptx
+++ b/neerlandais1/powerpoints/Module_15_Het_perfectum.pptx
@@ -135,18 +135,18 @@
   <p:extLst>
     <p:ext uri="{521415D9-36F7-43E2-AB2F-B90AF26B5E84}">
       <p14:sectionLst xmlns:p14="http://schemas.microsoft.com/office/powerpoint/2010/main">
-        <p14:section name="Ouverture" id="{8ba56c3a-f6f3-226e-8700-2bbd603defe2}">
+        <p14:section name="Ouverture" id="{b64bf5ad-ab48-0968-9091-9a04601f3835}">
           <p14:sldIdLst>
             <p14:sldId id="256"/>
           </p14:sldIdLst>
         </p14:section>
-        <p14:section name="Découvrir" id="{09068495-d94e-cbce-e839-c454909c1896}">
+        <p14:section name="Découvrir" id="{ecda856c-97a0-f007-05cc-058d2237af47}">
           <p14:sldIdLst>
             <p14:sldId id="257"/>
             <p14:sldId id="258"/>
           </p14:sldIdLst>
         </p14:section>
-        <p14:section name="Comprendre" id="{01b977d7-4f5d-9671-5500-3a0b087712f6}">
+        <p14:section name="Comprendre" id="{0f174275-703e-5b53-fcc0-cc14ea5ed5dd}">
           <p14:sldIdLst>
             <p14:sldId id="259"/>
             <p14:sldId id="260"/>
@@ -162,7 +162,7 @@
             <p14:sldId id="270"/>
           </p14:sldIdLst>
         </p14:section>
-        <p14:section name="JIJ NU ! — Oefeningen" id="{d11025f2-2f6a-da99-e4c1-8234af4d237b}">
+        <p14:section name="JIJ NU ! — Oefeningen" id="{f3768c62-87f4-1b8b-fa0c-79b0bbc8195f}">
           <p14:sldIdLst>
             <p14:sldId id="271"/>
             <p14:sldId id="272"/>
@@ -179,7 +179,7 @@
             <p14:sldId id="283"/>
           </p14:sldIdLst>
         </p14:section>
-        <p14:section name="Clôture" id="{11b248de-4d9c-be01-9c96-3a73b6d4ad1d}">
+        <p14:section name="Clôture" id="{f8687367-71c9-d1c1-cc8d-5ba3072d96c8}">
           <p14:sldIdLst>
             <p14:sldId id="284"/>
           </p14:sldIdLst>

--- a/neerlandais1/powerpoints/Module_15_Het_perfectum.pptx
+++ b/neerlandais1/powerpoints/Module_15_Het_perfectum.pptx
@@ -135,18 +135,18 @@
   <p:extLst>
     <p:ext uri="{521415D9-36F7-43E2-AB2F-B90AF26B5E84}">
       <p14:sectionLst xmlns:p14="http://schemas.microsoft.com/office/powerpoint/2010/main">
-        <p14:section name="Ouverture" id="{b64bf5ad-ab48-0968-9091-9a04601f3835}">
+        <p14:section name="Ouverture" id="{3403f53e-e1e9-431e-a77e-ec1b57c563a6}">
           <p14:sldIdLst>
             <p14:sldId id="256"/>
           </p14:sldIdLst>
         </p14:section>
-        <p14:section name="Découvrir" id="{ecda856c-97a0-f007-05cc-058d2237af47}">
+        <p14:section name="Découvrir" id="{c97be912-a2aa-b8c5-d85c-eaa988c300c3}">
           <p14:sldIdLst>
             <p14:sldId id="257"/>
             <p14:sldId id="258"/>
           </p14:sldIdLst>
         </p14:section>
-        <p14:section name="Comprendre" id="{0f174275-703e-5b53-fcc0-cc14ea5ed5dd}">
+        <p14:section name="Comprendre" id="{f1cb8d57-4d45-9d93-0446-5b7867ec9593}">
           <p14:sldIdLst>
             <p14:sldId id="259"/>
             <p14:sldId id="260"/>
@@ -162,7 +162,7 @@
             <p14:sldId id="270"/>
           </p14:sldIdLst>
         </p14:section>
-        <p14:section name="JIJ NU ! — Oefeningen" id="{f3768c62-87f4-1b8b-fa0c-79b0bbc8195f}">
+        <p14:section name="JIJ NU ! — Oefeningen" id="{a8fa84b6-e98d-9860-ebd9-7873676ae4b9}">
           <p14:sldIdLst>
             <p14:sldId id="271"/>
             <p14:sldId id="272"/>
@@ -179,7 +179,7 @@
             <p14:sldId id="283"/>
           </p14:sldIdLst>
         </p14:section>
-        <p14:section name="Clôture" id="{f8687367-71c9-d1c1-cc8d-5ba3072d96c8}">
+        <p14:section name="Clôture" id="{c5a3430a-8712-c08f-8d5a-20c047128c35}">
           <p14:sldIdLst>
             <p14:sldId id="284"/>
           </p14:sldIdLst>
